--- a/CryptoVault_Milestone1_24512.pptx
+++ b/CryptoVault_Milestone1_24512.pptx
@@ -337,7 +337,7 @@
             <a:fld id="{1D8BD707-D9CF-40AE-B4C6-C98DA3205C09}" type="datetimeFigureOut">
               <a:rPr lang="en-US" smtClean="0"/>
               <a:pPr/>
-              <a:t>3/23/2026</a:t>
+              <a:t>4/24/2026</a:t>
             </a:fld>
             <a:endParaRPr lang="en-US"/>
           </a:p>
@@ -502,7 +502,7 @@
             <a:fld id="{1D8BD707-D9CF-40AE-B4C6-C98DA3205C09}" type="datetimeFigureOut">
               <a:rPr lang="en-US" smtClean="0"/>
               <a:pPr/>
-              <a:t>3/23/2026</a:t>
+              <a:t>4/24/2026</a:t>
             </a:fld>
             <a:endParaRPr lang="en-US"/>
           </a:p>
@@ -677,7 +677,7 @@
             <a:fld id="{1D8BD707-D9CF-40AE-B4C6-C98DA3205C09}" type="datetimeFigureOut">
               <a:rPr lang="en-US" smtClean="0"/>
               <a:pPr/>
-              <a:t>3/23/2026</a:t>
+              <a:t>4/24/2026</a:t>
             </a:fld>
             <a:endParaRPr lang="en-US"/>
           </a:p>
@@ -842,7 +842,7 @@
             <a:fld id="{1D8BD707-D9CF-40AE-B4C6-C98DA3205C09}" type="datetimeFigureOut">
               <a:rPr lang="en-US" smtClean="0"/>
               <a:pPr/>
-              <a:t>3/23/2026</a:t>
+              <a:t>4/24/2026</a:t>
             </a:fld>
             <a:endParaRPr lang="en-US"/>
           </a:p>
@@ -1084,7 +1084,7 @@
             <a:fld id="{1D8BD707-D9CF-40AE-B4C6-C98DA3205C09}" type="datetimeFigureOut">
               <a:rPr lang="en-US" smtClean="0"/>
               <a:pPr/>
-              <a:t>3/23/2026</a:t>
+              <a:t>4/24/2026</a:t>
             </a:fld>
             <a:endParaRPr lang="en-US"/>
           </a:p>
@@ -1366,7 +1366,7 @@
             <a:fld id="{1D8BD707-D9CF-40AE-B4C6-C98DA3205C09}" type="datetimeFigureOut">
               <a:rPr lang="en-US" smtClean="0"/>
               <a:pPr/>
-              <a:t>3/23/2026</a:t>
+              <a:t>4/24/2026</a:t>
             </a:fld>
             <a:endParaRPr lang="en-US"/>
           </a:p>
@@ -1782,7 +1782,7 @@
             <a:fld id="{1D8BD707-D9CF-40AE-B4C6-C98DA3205C09}" type="datetimeFigureOut">
               <a:rPr lang="en-US" smtClean="0"/>
               <a:pPr/>
-              <a:t>3/23/2026</a:t>
+              <a:t>4/24/2026</a:t>
             </a:fld>
             <a:endParaRPr lang="en-US"/>
           </a:p>
@@ -1896,7 +1896,7 @@
             <a:fld id="{1D8BD707-D9CF-40AE-B4C6-C98DA3205C09}" type="datetimeFigureOut">
               <a:rPr lang="en-US" smtClean="0"/>
               <a:pPr/>
-              <a:t>3/23/2026</a:t>
+              <a:t>4/24/2026</a:t>
             </a:fld>
             <a:endParaRPr lang="en-US"/>
           </a:p>
@@ -1988,7 +1988,7 @@
             <a:fld id="{1D8BD707-D9CF-40AE-B4C6-C98DA3205C09}" type="datetimeFigureOut">
               <a:rPr lang="en-US" smtClean="0"/>
               <a:pPr/>
-              <a:t>3/23/2026</a:t>
+              <a:t>4/24/2026</a:t>
             </a:fld>
             <a:endParaRPr lang="en-US"/>
           </a:p>
@@ -2260,7 +2260,7 @@
             <a:fld id="{1D8BD707-D9CF-40AE-B4C6-C98DA3205C09}" type="datetimeFigureOut">
               <a:rPr lang="en-US" smtClean="0"/>
               <a:pPr/>
-              <a:t>3/23/2026</a:t>
+              <a:t>4/24/2026</a:t>
             </a:fld>
             <a:endParaRPr lang="en-US"/>
           </a:p>
@@ -2509,7 +2509,7 @@
             <a:fld id="{1D8BD707-D9CF-40AE-B4C6-C98DA3205C09}" type="datetimeFigureOut">
               <a:rPr lang="en-US" smtClean="0"/>
               <a:pPr/>
-              <a:t>3/23/2026</a:t>
+              <a:t>4/24/2026</a:t>
             </a:fld>
             <a:endParaRPr lang="en-US"/>
           </a:p>
@@ -2717,7 +2717,7 @@
             <a:fld id="{1D8BD707-D9CF-40AE-B4C6-C98DA3205C09}" type="datetimeFigureOut">
               <a:rPr lang="en-US" smtClean="0"/>
               <a:pPr/>
-              <a:t>3/23/2026</a:t>
+              <a:t>4/24/2026</a:t>
             </a:fld>
             <a:endParaRPr lang="en-US"/>
           </a:p>
@@ -3473,7 +3473,7 @@
                 <a:latin typeface="Arial" panose="020B0604020202020204" pitchFamily="34" charset="0"/>
                 <a:cs typeface="Arial" panose="020B0604020202020204" pitchFamily="34" charset="0"/>
               </a:rPr>
-              <a:t>PROJECT REVIEW : MILESTONE PROJECT – 1</a:t>
+              <a:t>PROJECT REVIEW : MILESTONE PROJECT – 2</a:t>
             </a:r>
           </a:p>
           <a:p>
@@ -3496,8 +3496,25 @@
                 <a:latin typeface="Arial" panose="020B0604020202020204" pitchFamily="34" charset="0"/>
                 <a:cs typeface="Arial" panose="020B0604020202020204" pitchFamily="34" charset="0"/>
               </a:rPr>
-              <a:t>Date: 23-03-2026</a:t>
+              <a:t>Date</a:t>
             </a:r>
+            <a:r>
+              <a:rPr lang="en-IN" sz="3600" b="1">
+                <a:solidFill>
+                  <a:srgbClr val="C00000"/>
+                </a:solidFill>
+                <a:latin typeface="Arial" panose="020B0604020202020204" pitchFamily="34" charset="0"/>
+                <a:cs typeface="Arial" panose="020B0604020202020204" pitchFamily="34" charset="0"/>
+              </a:rPr>
+              <a:t>: 24-04-2026</a:t>
+            </a:r>
+            <a:endParaRPr lang="en-IN" sz="3600" b="1" dirty="0">
+              <a:solidFill>
+                <a:srgbClr val="C00000"/>
+              </a:solidFill>
+              <a:latin typeface="Arial" panose="020B0604020202020204" pitchFamily="34" charset="0"/>
+              <a:cs typeface="Arial" panose="020B0604020202020204" pitchFamily="34" charset="0"/>
+            </a:endParaRPr>
           </a:p>
         </p:txBody>
       </p:sp>
@@ -3531,14 +3548,20 @@
           <a:p>
             <a:pPr algn="ctr"/>
             <a:r>
-              <a:rPr lang="en-US" sz="3200" b="1" dirty="0">
+              <a:rPr lang="en-IN" sz="3200" b="1" dirty="0" err="1">
                 <a:solidFill>
                   <a:srgbClr val="0033CC"/>
                 </a:solidFill>
-                <a:latin typeface="Times New Roman" panose="02020603050405020304" pitchFamily="18" charset="0"/>
-                <a:cs typeface="Times New Roman" panose="02020603050405020304" pitchFamily="18" charset="0"/>
               </a:rPr>
-              <a:t>CryptoVault: Secure File Storage System with AES Encryption</a:t>
+              <a:t>CryptoVault</a:t>
+            </a:r>
+            <a:r>
+              <a:rPr lang="en-IN" sz="3200" b="1" dirty="0">
+                <a:solidFill>
+                  <a:srgbClr val="0033CC"/>
+                </a:solidFill>
+              </a:rPr>
+              <a:t>: Enterprise-Grade Secure Storage System with AES Cryptography</a:t>
             </a:r>
             <a:endParaRPr lang="en-IN" sz="3200" b="1" dirty="0">
               <a:solidFill>
@@ -6735,7 +6758,7 @@
         </p:blipFill>
         <p:spPr>
           <a:xfrm>
-            <a:off x="6858000" y="1455127"/>
+            <a:off x="3352800" y="1472826"/>
             <a:ext cx="4572000" cy="7305092"/>
           </a:xfrm>
           <a:prstGeom prst="rect">
@@ -6786,6 +6809,36 @@
           </a:p>
         </p:txBody>
       </p:sp>
+      <p:pic>
+        <p:nvPicPr>
+          <p:cNvPr id="4" name="Picture 3">
+            <a:extLst>
+              <a:ext uri="{FF2B5EF4-FFF2-40B4-BE49-F238E27FC236}">
+                <a16:creationId xmlns:a16="http://schemas.microsoft.com/office/drawing/2014/main" id="{CFA56BB2-43BB-D1E2-5B93-EC2486FA5C1B}"/>
+              </a:ext>
+            </a:extLst>
+          </p:cNvPr>
+          <p:cNvPicPr>
+            <a:picLocks noChangeAspect="1"/>
+          </p:cNvPicPr>
+          <p:nvPr/>
+        </p:nvPicPr>
+        <p:blipFill>
+          <a:blip r:embed="rId4"/>
+          <a:stretch>
+            <a:fillRect/>
+          </a:stretch>
+        </p:blipFill>
+        <p:spPr>
+          <a:xfrm>
+            <a:off x="9549549" y="1469119"/>
+            <a:ext cx="6973355" cy="7305092"/>
+          </a:xfrm>
+          <a:prstGeom prst="rect">
+            <a:avLst/>
+          </a:prstGeom>
+        </p:spPr>
+      </p:pic>
     </p:spTree>
     <p:extLst>
       <p:ext uri="{BB962C8B-B14F-4D97-AF65-F5344CB8AC3E}">
@@ -8277,8 +8330,8 @@
         </p:blipFill>
         <p:spPr>
           <a:xfrm>
-            <a:off x="4514204" y="1528258"/>
-            <a:ext cx="9259592" cy="7230484"/>
+            <a:off x="2825763" y="1579566"/>
+            <a:ext cx="6318237" cy="7230484"/>
           </a:xfrm>
           <a:prstGeom prst="rect">
             <a:avLst/>
@@ -8328,6 +8381,36 @@
           </a:p>
         </p:txBody>
       </p:sp>
+      <p:pic>
+        <p:nvPicPr>
+          <p:cNvPr id="4" name="Picture 3">
+            <a:extLst>
+              <a:ext uri="{FF2B5EF4-FFF2-40B4-BE49-F238E27FC236}">
+                <a16:creationId xmlns:a16="http://schemas.microsoft.com/office/drawing/2014/main" id="{F9BA8A42-0169-048E-54C4-0CB052FE0C4B}"/>
+              </a:ext>
+            </a:extLst>
+          </p:cNvPr>
+          <p:cNvPicPr>
+            <a:picLocks noChangeAspect="1"/>
+          </p:cNvPicPr>
+          <p:nvPr/>
+        </p:nvPicPr>
+        <p:blipFill>
+          <a:blip r:embed="rId4"/>
+          <a:stretch>
+            <a:fillRect/>
+          </a:stretch>
+        </p:blipFill>
+        <p:spPr>
+          <a:xfrm>
+            <a:off x="9906000" y="1550390"/>
+            <a:ext cx="6172200" cy="7098309"/>
+          </a:xfrm>
+          <a:prstGeom prst="rect">
+            <a:avLst/>
+          </a:prstGeom>
+        </p:spPr>
+      </p:pic>
     </p:spTree>
     <p:extLst>
       <p:ext uri="{BB962C8B-B14F-4D97-AF65-F5344CB8AC3E}">
@@ -9809,7 +9892,7 @@
         </p:blipFill>
         <p:spPr>
           <a:xfrm>
-            <a:off x="5748543" y="3191917"/>
+            <a:off x="5479555" y="2581720"/>
             <a:ext cx="7939611" cy="2177699"/>
           </a:xfrm>
           <a:prstGeom prst="rect">
@@ -12866,7 +12949,7 @@
         <p:spPr>
           <a:xfrm>
             <a:off x="2209800" y="1638300"/>
-            <a:ext cx="15082325" cy="12588061"/>
+            <a:ext cx="15082325" cy="13018949"/>
           </a:xfrm>
           <a:prstGeom prst="rect">
             <a:avLst/>
@@ -12915,53 +12998,6 @@
             <a:r>
               <a:rPr lang="en-GB" sz="2800" dirty="0"/>
               <a:t>This project is important to ensure secure file storage and safe data handling.</a:t>
-            </a:r>
-          </a:p>
-          <a:p>
-            <a:pPr marL="457200" indent="-457200">
-              <a:lnSpc>
-                <a:spcPct val="150000"/>
-              </a:lnSpc>
-              <a:buFontTx/>
-              <a:buChar char="-"/>
-            </a:pPr>
-            <a:r>
-              <a:rPr lang="en-GB" sz="2800" dirty="0"/>
-              <a:t> It has real-world applications in banking, healthcare, and cloud storage systems.</a:t>
-            </a:r>
-          </a:p>
-          <a:p>
-            <a:pPr marL="457200" indent="-457200">
-              <a:lnSpc>
-                <a:spcPct val="150000"/>
-              </a:lnSpc>
-              <a:buFontTx/>
-              <a:buChar char="-"/>
-            </a:pPr>
-            <a:r>
-              <a:rPr lang="en-GB" sz="2800" dirty="0"/>
-              <a:t> </a:t>
-            </a:r>
-            <a:r>
-              <a:rPr lang="en-GB" sz="2800" dirty="0" err="1"/>
-              <a:t>CryptoVault</a:t>
-            </a:r>
-            <a:r>
-              <a:rPr lang="en-GB" sz="2800" dirty="0"/>
-              <a:t> is developed using Spring Boot for secure backend processing. </a:t>
-            </a:r>
-          </a:p>
-          <a:p>
-            <a:pPr marL="457200" indent="-457200">
-              <a:lnSpc>
-                <a:spcPct val="150000"/>
-              </a:lnSpc>
-              <a:buFontTx/>
-              <a:buChar char="-"/>
-            </a:pPr>
-            <a:r>
-              <a:rPr lang="en-GB" sz="2800" dirty="0"/>
-              <a:t>It uses AES to encrypt files before storing them. File details are stored in MySQL for easy management. </a:t>
             </a:r>
           </a:p>
           <a:p>
@@ -12979,17 +13015,71 @@
             <a:endParaRPr lang="en-US" sz="2800" dirty="0"/>
           </a:p>
           <a:p>
-            <a:pPr marL="457200" indent="-457200">
-              <a:lnSpc>
-                <a:spcPct val="150000"/>
-              </a:lnSpc>
-              <a:buFontTx/>
-              <a:buChar char="-"/>
-            </a:pPr>
             <a:r>
               <a:rPr lang="en-US" sz="2800" dirty="0"/>
               <a:t>This project is highly relevant in industries such as healthcare, legal, and banking, where secure file storage is mandatory for compliance and data protection.</a:t>
             </a:r>
+            <a:r>
+              <a:rPr lang="en-IN" sz="2800" dirty="0"/>
+              <a:t> Provide a highly secure, encrypted environment for personal file storage</a:t>
+            </a:r>
+          </a:p>
+          <a:p>
+            <a:r>
+              <a:rPr lang="en-IN" sz="2800" dirty="0"/>
+              <a:t>Enable flexible subscription models and compliance features</a:t>
+            </a:r>
+          </a:p>
+          <a:p>
+            <a:endParaRPr lang="en-IN" sz="2800" b="1" dirty="0"/>
+          </a:p>
+          <a:p>
+            <a:r>
+              <a:rPr lang="en-IN" sz="2800" b="1" dirty="0"/>
+              <a:t>Key Features:</a:t>
+            </a:r>
+            <a:endParaRPr lang="en-IN" sz="2800" dirty="0"/>
+          </a:p>
+          <a:p>
+            <a:r>
+              <a:rPr lang="en-IN" sz="2800" b="1" dirty="0"/>
+              <a:t>Client-side AES-128 Encryption</a:t>
+            </a:r>
+            <a:r>
+              <a:rPr lang="en-IN" sz="2800" dirty="0"/>
+              <a:t> - Files encrypted on user's device</a:t>
+            </a:r>
+          </a:p>
+          <a:p>
+            <a:r>
+              <a:rPr lang="en-IN" sz="2800" b="1" dirty="0"/>
+              <a:t>Multi-tier Subscription Model</a:t>
+            </a:r>
+            <a:r>
+              <a:rPr lang="en-IN" sz="2800" dirty="0"/>
+              <a:t> - Weekly, Monthly, Annual plans</a:t>
+            </a:r>
+          </a:p>
+          <a:p>
+            <a:r>
+              <a:rPr lang="en-IN" sz="2800" b="1" dirty="0"/>
+              <a:t>Mandatory Identity Verification (KYC)</a:t>
+            </a:r>
+            <a:r>
+              <a:rPr lang="en-IN" sz="2800" dirty="0"/>
+              <a:t> - Compliance and security</a:t>
+            </a:r>
+          </a:p>
+          <a:p>
+            <a:r>
+              <a:rPr lang="en-IN" sz="2800" b="1" dirty="0"/>
+              <a:t>Centralized Administrative Oversight</a:t>
+            </a:r>
+            <a:r>
+              <a:rPr lang="en-IN" sz="2800" dirty="0"/>
+              <a:t> - Real-time monitoring and control</a:t>
+            </a:r>
+            <a:endParaRPr lang="en-US" sz="2800" dirty="0"/>
           </a:p>
           <a:p>
             <a:pPr marL="457200" indent="-457200">
@@ -19825,7 +19915,7 @@
         </p:blipFill>
         <p:spPr>
           <a:xfrm>
-            <a:off x="5500687" y="1638300"/>
+            <a:off x="2743200" y="1485900"/>
             <a:ext cx="7286625" cy="8382000"/>
           </a:xfrm>
           <a:prstGeom prst="rect">
@@ -19833,6 +19923,631 @@
           </a:prstGeom>
         </p:spPr>
       </p:pic>
+      <p:graphicFrame>
+        <p:nvGraphicFramePr>
+          <p:cNvPr id="3" name="Table 2">
+            <a:extLst>
+              <a:ext uri="{FF2B5EF4-FFF2-40B4-BE49-F238E27FC236}">
+                <a16:creationId xmlns:a16="http://schemas.microsoft.com/office/drawing/2014/main" id="{C9B7BCAD-899E-5101-73C0-AFFEFA4291D1}"/>
+              </a:ext>
+            </a:extLst>
+          </p:cNvPr>
+          <p:cNvGraphicFramePr>
+            <a:graphicFrameLocks noGrp="1"/>
+          </p:cNvGraphicFramePr>
+          <p:nvPr>
+            <p:extLst>
+              <p:ext uri="{D42A27DB-BD31-4B8C-83A1-F6EECF244321}">
+                <p14:modId xmlns:p14="http://schemas.microsoft.com/office/powerpoint/2010/main" val="2386188362"/>
+              </p:ext>
+            </p:extLst>
+          </p:nvPr>
+        </p:nvGraphicFramePr>
+        <p:xfrm>
+          <a:off x="10029825" y="3110285"/>
+          <a:ext cx="8229600" cy="2011680"/>
+        </p:xfrm>
+        <a:graphic>
+          <a:graphicData uri="http://schemas.openxmlformats.org/drawingml/2006/table">
+            <a:tbl>
+              <a:tblPr/>
+              <a:tblGrid>
+                <a:gridCol w="2057400">
+                  <a:extLst>
+                    <a:ext uri="{9D8B030D-6E8A-4147-A177-3AD203B41FA5}">
+                      <a16:colId xmlns:a16="http://schemas.microsoft.com/office/drawing/2014/main" val="2092175232"/>
+                    </a:ext>
+                  </a:extLst>
+                </a:gridCol>
+                <a:gridCol w="2057400">
+                  <a:extLst>
+                    <a:ext uri="{9D8B030D-6E8A-4147-A177-3AD203B41FA5}">
+                      <a16:colId xmlns:a16="http://schemas.microsoft.com/office/drawing/2014/main" val="3624059265"/>
+                    </a:ext>
+                  </a:extLst>
+                </a:gridCol>
+                <a:gridCol w="2057400">
+                  <a:extLst>
+                    <a:ext uri="{9D8B030D-6E8A-4147-A177-3AD203B41FA5}">
+                      <a16:colId xmlns:a16="http://schemas.microsoft.com/office/drawing/2014/main" val="3184014183"/>
+                    </a:ext>
+                  </a:extLst>
+                </a:gridCol>
+                <a:gridCol w="2057400">
+                  <a:extLst>
+                    <a:ext uri="{9D8B030D-6E8A-4147-A177-3AD203B41FA5}">
+                      <a16:colId xmlns:a16="http://schemas.microsoft.com/office/drawing/2014/main" val="1922560449"/>
+                    </a:ext>
+                  </a:extLst>
+                </a:gridCol>
+              </a:tblGrid>
+              <a:tr h="0">
+                <a:tc>
+                  <a:txBody>
+                    <a:bodyPr/>
+                    <a:lstStyle/>
+                    <a:p>
+                      <a:pPr>
+                        <a:buNone/>
+                      </a:pPr>
+                      <a:r>
+                        <a:rPr lang="en-IN"/>
+                        <a:t>Plan</a:t>
+                      </a:r>
+                    </a:p>
+                  </a:txBody>
+                  <a:tcPr anchor="ctr">
+                    <a:lnL>
+                      <a:noFill/>
+                    </a:lnL>
+                    <a:lnR>
+                      <a:noFill/>
+                    </a:lnR>
+                    <a:lnT>
+                      <a:noFill/>
+                    </a:lnT>
+                    <a:lnB>
+                      <a:noFill/>
+                    </a:lnB>
+                    <a:noFill/>
+                  </a:tcPr>
+                </a:tc>
+                <a:tc>
+                  <a:txBody>
+                    <a:bodyPr/>
+                    <a:lstStyle/>
+                    <a:p>
+                      <a:pPr>
+                        <a:buNone/>
+                      </a:pPr>
+                      <a:r>
+                        <a:rPr lang="en-IN"/>
+                        <a:t>Price</a:t>
+                      </a:r>
+                    </a:p>
+                  </a:txBody>
+                  <a:tcPr anchor="ctr">
+                    <a:lnL>
+                      <a:noFill/>
+                    </a:lnL>
+                    <a:lnR>
+                      <a:noFill/>
+                    </a:lnR>
+                    <a:lnT>
+                      <a:noFill/>
+                    </a:lnT>
+                    <a:lnB>
+                      <a:noFill/>
+                    </a:lnB>
+                    <a:noFill/>
+                  </a:tcPr>
+                </a:tc>
+                <a:tc>
+                  <a:txBody>
+                    <a:bodyPr/>
+                    <a:lstStyle/>
+                    <a:p>
+                      <a:pPr>
+                        <a:buNone/>
+                      </a:pPr>
+                      <a:r>
+                        <a:rPr lang="en-IN"/>
+                        <a:t>Storage</a:t>
+                      </a:r>
+                    </a:p>
+                  </a:txBody>
+                  <a:tcPr anchor="ctr">
+                    <a:lnL>
+                      <a:noFill/>
+                    </a:lnL>
+                    <a:lnR>
+                      <a:noFill/>
+                    </a:lnR>
+                    <a:lnT>
+                      <a:noFill/>
+                    </a:lnT>
+                    <a:lnB>
+                      <a:noFill/>
+                    </a:lnB>
+                    <a:noFill/>
+                  </a:tcPr>
+                </a:tc>
+                <a:tc>
+                  <a:txBody>
+                    <a:bodyPr/>
+                    <a:lstStyle/>
+                    <a:p>
+                      <a:pPr>
+                        <a:buNone/>
+                      </a:pPr>
+                      <a:r>
+                        <a:rPr lang="en-IN"/>
+                        <a:t>Support</a:t>
+                      </a:r>
+                    </a:p>
+                  </a:txBody>
+                  <a:tcPr anchor="ctr">
+                    <a:lnL>
+                      <a:noFill/>
+                    </a:lnL>
+                    <a:lnR>
+                      <a:noFill/>
+                    </a:lnR>
+                    <a:lnT>
+                      <a:noFill/>
+                    </a:lnT>
+                    <a:lnB>
+                      <a:noFill/>
+                    </a:lnB>
+                    <a:noFill/>
+                  </a:tcPr>
+                </a:tc>
+                <a:extLst>
+                  <a:ext uri="{0D108BD9-81ED-4DB2-BD59-A6C34878D82A}">
+                    <a16:rowId xmlns:a16="http://schemas.microsoft.com/office/drawing/2014/main" val="3235457662"/>
+                  </a:ext>
+                </a:extLst>
+              </a:tr>
+              <a:tr h="0">
+                <a:tc>
+                  <a:txBody>
+                    <a:bodyPr/>
+                    <a:lstStyle/>
+                    <a:p>
+                      <a:pPr>
+                        <a:buNone/>
+                      </a:pPr>
+                      <a:r>
+                        <a:rPr lang="en-IN" b="1" dirty="0"/>
+                        <a:t>Weekly Plan</a:t>
+                      </a:r>
+                      <a:endParaRPr lang="en-IN" dirty="0"/>
+                    </a:p>
+                  </a:txBody>
+                  <a:tcPr anchor="ctr">
+                    <a:lnL>
+                      <a:noFill/>
+                    </a:lnL>
+                    <a:lnR>
+                      <a:noFill/>
+                    </a:lnR>
+                    <a:lnT>
+                      <a:noFill/>
+                    </a:lnT>
+                    <a:lnB>
+                      <a:noFill/>
+                    </a:lnB>
+                    <a:noFill/>
+                  </a:tcPr>
+                </a:tc>
+                <a:tc>
+                  <a:txBody>
+                    <a:bodyPr/>
+                    <a:lstStyle/>
+                    <a:p>
+                      <a:pPr>
+                        <a:buNone/>
+                      </a:pPr>
+                      <a:r>
+                        <a:rPr lang="en-IN"/>
+                        <a:t>$5</a:t>
+                      </a:r>
+                    </a:p>
+                  </a:txBody>
+                  <a:tcPr anchor="ctr">
+                    <a:lnL>
+                      <a:noFill/>
+                    </a:lnL>
+                    <a:lnR>
+                      <a:noFill/>
+                    </a:lnR>
+                    <a:lnT>
+                      <a:noFill/>
+                    </a:lnT>
+                    <a:lnB>
+                      <a:noFill/>
+                    </a:lnB>
+                    <a:noFill/>
+                  </a:tcPr>
+                </a:tc>
+                <a:tc>
+                  <a:txBody>
+                    <a:bodyPr/>
+                    <a:lstStyle/>
+                    <a:p>
+                      <a:pPr>
+                        <a:buNone/>
+                      </a:pPr>
+                      <a:r>
+                        <a:rPr lang="en-IN"/>
+                        <a:t>10GB</a:t>
+                      </a:r>
+                    </a:p>
+                  </a:txBody>
+                  <a:tcPr anchor="ctr">
+                    <a:lnL>
+                      <a:noFill/>
+                    </a:lnL>
+                    <a:lnR>
+                      <a:noFill/>
+                    </a:lnR>
+                    <a:lnT>
+                      <a:noFill/>
+                    </a:lnT>
+                    <a:lnB>
+                      <a:noFill/>
+                    </a:lnB>
+                    <a:noFill/>
+                  </a:tcPr>
+                </a:tc>
+                <a:tc>
+                  <a:txBody>
+                    <a:bodyPr/>
+                    <a:lstStyle/>
+                    <a:p>
+                      <a:pPr>
+                        <a:buNone/>
+                      </a:pPr>
+                      <a:r>
+                        <a:rPr lang="en-IN"/>
+                        <a:t>Basic Support</a:t>
+                      </a:r>
+                    </a:p>
+                  </a:txBody>
+                  <a:tcPr anchor="ctr">
+                    <a:lnL>
+                      <a:noFill/>
+                    </a:lnL>
+                    <a:lnR>
+                      <a:noFill/>
+                    </a:lnR>
+                    <a:lnT>
+                      <a:noFill/>
+                    </a:lnT>
+                    <a:lnB>
+                      <a:noFill/>
+                    </a:lnB>
+                    <a:noFill/>
+                  </a:tcPr>
+                </a:tc>
+                <a:extLst>
+                  <a:ext uri="{0D108BD9-81ED-4DB2-BD59-A6C34878D82A}">
+                    <a16:rowId xmlns:a16="http://schemas.microsoft.com/office/drawing/2014/main" val="1564872163"/>
+                  </a:ext>
+                </a:extLst>
+              </a:tr>
+              <a:tr h="0">
+                <a:tc>
+                  <a:txBody>
+                    <a:bodyPr/>
+                    <a:lstStyle/>
+                    <a:p>
+                      <a:pPr>
+                        <a:buNone/>
+                      </a:pPr>
+                      <a:r>
+                        <a:rPr lang="en-IN" b="1"/>
+                        <a:t>Monthly Plan</a:t>
+                      </a:r>
+                      <a:endParaRPr lang="en-IN"/>
+                    </a:p>
+                  </a:txBody>
+                  <a:tcPr anchor="ctr">
+                    <a:lnL>
+                      <a:noFill/>
+                    </a:lnL>
+                    <a:lnR>
+                      <a:noFill/>
+                    </a:lnR>
+                    <a:lnT>
+                      <a:noFill/>
+                    </a:lnT>
+                    <a:lnB>
+                      <a:noFill/>
+                    </a:lnB>
+                    <a:noFill/>
+                  </a:tcPr>
+                </a:tc>
+                <a:tc>
+                  <a:txBody>
+                    <a:bodyPr/>
+                    <a:lstStyle/>
+                    <a:p>
+                      <a:pPr>
+                        <a:buNone/>
+                      </a:pPr>
+                      <a:r>
+                        <a:rPr lang="en-IN"/>
+                        <a:t>$15</a:t>
+                      </a:r>
+                    </a:p>
+                  </a:txBody>
+                  <a:tcPr anchor="ctr">
+                    <a:lnL>
+                      <a:noFill/>
+                    </a:lnL>
+                    <a:lnR>
+                      <a:noFill/>
+                    </a:lnR>
+                    <a:lnT>
+                      <a:noFill/>
+                    </a:lnT>
+                    <a:lnB>
+                      <a:noFill/>
+                    </a:lnB>
+                    <a:noFill/>
+                  </a:tcPr>
+                </a:tc>
+                <a:tc>
+                  <a:txBody>
+                    <a:bodyPr/>
+                    <a:lstStyle/>
+                    <a:p>
+                      <a:pPr>
+                        <a:buNone/>
+                      </a:pPr>
+                      <a:r>
+                        <a:rPr lang="en-IN"/>
+                        <a:t>50GB</a:t>
+                      </a:r>
+                    </a:p>
+                  </a:txBody>
+                  <a:tcPr anchor="ctr">
+                    <a:lnL>
+                      <a:noFill/>
+                    </a:lnL>
+                    <a:lnR>
+                      <a:noFill/>
+                    </a:lnR>
+                    <a:lnT>
+                      <a:noFill/>
+                    </a:lnT>
+                    <a:lnB>
+                      <a:noFill/>
+                    </a:lnB>
+                    <a:noFill/>
+                  </a:tcPr>
+                </a:tc>
+                <a:tc>
+                  <a:txBody>
+                    <a:bodyPr/>
+                    <a:lstStyle/>
+                    <a:p>
+                      <a:pPr>
+                        <a:buNone/>
+                      </a:pPr>
+                      <a:r>
+                        <a:rPr lang="en-IN"/>
+                        <a:t>Priority Support + AES-256 Upgrade</a:t>
+                      </a:r>
+                    </a:p>
+                  </a:txBody>
+                  <a:tcPr anchor="ctr">
+                    <a:lnL>
+                      <a:noFill/>
+                    </a:lnL>
+                    <a:lnR>
+                      <a:noFill/>
+                    </a:lnR>
+                    <a:lnT>
+                      <a:noFill/>
+                    </a:lnT>
+                    <a:lnB>
+                      <a:noFill/>
+                    </a:lnB>
+                    <a:noFill/>
+                  </a:tcPr>
+                </a:tc>
+                <a:extLst>
+                  <a:ext uri="{0D108BD9-81ED-4DB2-BD59-A6C34878D82A}">
+                    <a16:rowId xmlns:a16="http://schemas.microsoft.com/office/drawing/2014/main" val="826831188"/>
+                  </a:ext>
+                </a:extLst>
+              </a:tr>
+              <a:tr h="0">
+                <a:tc>
+                  <a:txBody>
+                    <a:bodyPr/>
+                    <a:lstStyle/>
+                    <a:p>
+                      <a:pPr>
+                        <a:buNone/>
+                      </a:pPr>
+                      <a:r>
+                        <a:rPr lang="en-IN" b="1"/>
+                        <a:t>Annual Plan</a:t>
+                      </a:r>
+                      <a:endParaRPr lang="en-IN"/>
+                    </a:p>
+                  </a:txBody>
+                  <a:tcPr anchor="ctr">
+                    <a:lnL>
+                      <a:noFill/>
+                    </a:lnL>
+                    <a:lnR>
+                      <a:noFill/>
+                    </a:lnR>
+                    <a:lnT>
+                      <a:noFill/>
+                    </a:lnT>
+                    <a:lnB>
+                      <a:noFill/>
+                    </a:lnB>
+                    <a:noFill/>
+                  </a:tcPr>
+                </a:tc>
+                <a:tc>
+                  <a:txBody>
+                    <a:bodyPr/>
+                    <a:lstStyle/>
+                    <a:p>
+                      <a:pPr>
+                        <a:buNone/>
+                      </a:pPr>
+                      <a:r>
+                        <a:rPr lang="en-IN"/>
+                        <a:t>$120</a:t>
+                      </a:r>
+                    </a:p>
+                  </a:txBody>
+                  <a:tcPr anchor="ctr">
+                    <a:lnL>
+                      <a:noFill/>
+                    </a:lnL>
+                    <a:lnR>
+                      <a:noFill/>
+                    </a:lnR>
+                    <a:lnT>
+                      <a:noFill/>
+                    </a:lnT>
+                    <a:lnB>
+                      <a:noFill/>
+                    </a:lnB>
+                    <a:noFill/>
+                  </a:tcPr>
+                </a:tc>
+                <a:tc>
+                  <a:txBody>
+                    <a:bodyPr/>
+                    <a:lstStyle/>
+                    <a:p>
+                      <a:pPr>
+                        <a:buNone/>
+                      </a:pPr>
+                      <a:r>
+                        <a:rPr lang="en-IN"/>
+                        <a:t>Unlimited</a:t>
+                      </a:r>
+                    </a:p>
+                  </a:txBody>
+                  <a:tcPr anchor="ctr">
+                    <a:lnL>
+                      <a:noFill/>
+                    </a:lnL>
+                    <a:lnR>
+                      <a:noFill/>
+                    </a:lnR>
+                    <a:lnT>
+                      <a:noFill/>
+                    </a:lnT>
+                    <a:lnB>
+                      <a:noFill/>
+                    </a:lnB>
+                    <a:noFill/>
+                  </a:tcPr>
+                </a:tc>
+                <a:tc>
+                  <a:txBody>
+                    <a:bodyPr/>
+                    <a:lstStyle/>
+                    <a:p>
+                      <a:pPr>
+                        <a:buNone/>
+                      </a:pPr>
+                      <a:r>
+                        <a:rPr lang="en-IN" dirty="0"/>
+                        <a:t>24/7 Dedicated Support</a:t>
+                      </a:r>
+                    </a:p>
+                  </a:txBody>
+                  <a:tcPr anchor="ctr">
+                    <a:lnL>
+                      <a:noFill/>
+                    </a:lnL>
+                    <a:lnR>
+                      <a:noFill/>
+                    </a:lnR>
+                    <a:lnT>
+                      <a:noFill/>
+                    </a:lnT>
+                    <a:lnB>
+                      <a:noFill/>
+                    </a:lnB>
+                    <a:noFill/>
+                  </a:tcPr>
+                </a:tc>
+                <a:extLst>
+                  <a:ext uri="{0D108BD9-81ED-4DB2-BD59-A6C34878D82A}">
+                    <a16:rowId xmlns:a16="http://schemas.microsoft.com/office/drawing/2014/main" val="1411156747"/>
+                  </a:ext>
+                </a:extLst>
+              </a:tr>
+            </a:tbl>
+          </a:graphicData>
+        </a:graphic>
+      </p:graphicFrame>
+      <p:sp>
+        <p:nvSpPr>
+          <p:cNvPr id="6" name="TextBox 5">
+            <a:extLst>
+              <a:ext uri="{FF2B5EF4-FFF2-40B4-BE49-F238E27FC236}">
+                <a16:creationId xmlns:a16="http://schemas.microsoft.com/office/drawing/2014/main" id="{0DA9B81A-5B19-CA49-6FC3-8DE974108563}"/>
+              </a:ext>
+            </a:extLst>
+          </p:cNvPr>
+          <p:cNvSpPr txBox="1"/>
+          <p:nvPr/>
+        </p:nvSpPr>
+        <p:spPr>
+          <a:xfrm>
+            <a:off x="10029825" y="1854376"/>
+            <a:ext cx="7924802" cy="923330"/>
+          </a:xfrm>
+          <a:prstGeom prst="rect">
+            <a:avLst/>
+          </a:prstGeom>
+          <a:noFill/>
+        </p:spPr>
+        <p:txBody>
+          <a:bodyPr wrap="square">
+            <a:spAutoFit/>
+          </a:bodyPr>
+          <a:lstStyle/>
+          <a:p>
+            <a:pPr>
+              <a:buNone/>
+            </a:pPr>
+            <a:r>
+              <a:rPr lang="en-IN" b="1" dirty="0"/>
+              <a:t>Three-Tier Subscription System:</a:t>
+            </a:r>
+            <a:endParaRPr lang="en-IN" dirty="0"/>
+          </a:p>
+          <a:p>
+            <a:pPr>
+              <a:buNone/>
+            </a:pPr>
+            <a:r>
+              <a:rPr lang="en-IN" b="1" dirty="0"/>
+              <a:t>Implementation:</a:t>
+            </a:r>
+            <a:r>
+              <a:rPr lang="en-IN" dirty="0"/>
+              <a:t> Dynamic payment modal for seamless upgrades and plan switching</a:t>
+            </a:r>
+          </a:p>
+        </p:txBody>
+      </p:sp>
     </p:spTree>
   </p:cSld>
   <p:clrMapOvr>
